--- a/modulo-01/01.02 - Aplicando Técnicas e Conceitos Básicos/01.02_Técnicas_básicas_da_linguagem_ABAP.pptx
+++ b/modulo-01/01.02 - Aplicando Técnicas e Conceitos Básicos/01.02_Técnicas_básicas_da_linguagem_ABAP.pptx
@@ -17880,7 +17880,7 @@
                             <a:srgbClr val="1D2D3E"/>
                           </a:solidFill>
                         </a:rPr>
-                        <a:t>Aula 04.02</a:t>
+                        <a:t>Aula 02.02</a:t>
                       </a:r>
                       <a:endParaRPr lang="en-US" sz="1200" dirty="0"/>
                     </a:p>
@@ -18282,7 +18282,7 @@
                             <a:srgbClr val="1D2D3E"/>
                           </a:solidFill>
                         </a:rPr>
-                        <a:t>Aula 04.05</a:t>
+                        <a:t>Aula 02.05</a:t>
                       </a:r>
                       <a:endParaRPr lang="en-US" sz="1200" dirty="0"/>
                     </a:p>
@@ -20496,7 +20496,7 @@
         </p:blipFill>
         <p:spPr>
           <a:xfrm>
-            <a:off x="8275091" y="1847088"/>
+            <a:off x="2636444" y="3858768"/>
             <a:ext cx="347472" cy="347472"/>
           </a:xfrm>
           <a:prstGeom prst="rect">
@@ -20568,7 +20568,7 @@
         </p:blipFill>
         <p:spPr>
           <a:xfrm>
-            <a:off x="2636444" y="3858768"/>
+            <a:off x="8275091" y="1847088"/>
             <a:ext cx="347472" cy="347472"/>
           </a:xfrm>
           <a:prstGeom prst="rect">
@@ -26065,7 +26065,7 @@
         </p:blipFill>
         <p:spPr>
           <a:xfrm>
-            <a:off x="850392" y="2793492"/>
+            <a:off x="9342653" y="2793492"/>
             <a:ext cx="256032" cy="256032"/>
           </a:xfrm>
           <a:prstGeom prst="rect">
@@ -26089,7 +26089,7 @@
         </p:blipFill>
         <p:spPr>
           <a:xfrm>
-            <a:off x="3681146" y="2793492"/>
+            <a:off x="850392" y="2793492"/>
             <a:ext cx="256032" cy="256032"/>
           </a:xfrm>
           <a:prstGeom prst="rect">
@@ -26113,7 +26113,7 @@
         </p:blipFill>
         <p:spPr>
           <a:xfrm>
-            <a:off x="6511900" y="2793492"/>
+            <a:off x="3681146" y="2793492"/>
             <a:ext cx="256032" cy="256032"/>
           </a:xfrm>
           <a:prstGeom prst="rect">
@@ -26137,7 +26137,7 @@
         </p:blipFill>
         <p:spPr>
           <a:xfrm>
-            <a:off x="9342653" y="2793492"/>
+            <a:off x="6511900" y="2793492"/>
             <a:ext cx="256032" cy="256032"/>
           </a:xfrm>
           <a:prstGeom prst="rect">
@@ -27064,7 +27064,7 @@
         </p:blipFill>
         <p:spPr>
           <a:xfrm>
-            <a:off x="822960" y="1965960"/>
+            <a:off x="6355080" y="1965960"/>
             <a:ext cx="256032" cy="256032"/>
           </a:xfrm>
           <a:prstGeom prst="rect">
@@ -27088,7 +27088,7 @@
         </p:blipFill>
         <p:spPr>
           <a:xfrm>
-            <a:off x="6355080" y="1965960"/>
+            <a:off x="822960" y="1965960"/>
             <a:ext cx="256032" cy="256032"/>
           </a:xfrm>
           <a:prstGeom prst="rect">
@@ -27136,7 +27136,7 @@
         </p:blipFill>
         <p:spPr>
           <a:xfrm>
-            <a:off x="6355080" y="2926080"/>
+            <a:off x="822960" y="3886200"/>
             <a:ext cx="256032" cy="256032"/>
           </a:xfrm>
           <a:prstGeom prst="rect">
@@ -27160,7 +27160,7 @@
         </p:blipFill>
         <p:spPr>
           <a:xfrm>
-            <a:off x="822960" y="3886200"/>
+            <a:off x="6355080" y="2926080"/>
             <a:ext cx="256032" cy="256032"/>
           </a:xfrm>
           <a:prstGeom prst="rect">
@@ -27968,8 +27968,8 @@
         </p:blipFill>
         <p:spPr>
           <a:xfrm>
-            <a:off x="850392" y="3043047"/>
-            <a:ext cx="256032" cy="256032"/>
+            <a:off x="749808" y="5186553"/>
+            <a:ext cx="310896" cy="310896"/>
           </a:xfrm>
           <a:prstGeom prst="rect">
             <a:avLst/>
@@ -27992,7 +27992,7 @@
         </p:blipFill>
         <p:spPr>
           <a:xfrm>
-            <a:off x="4624730" y="3043047"/>
+            <a:off x="850392" y="3043047"/>
             <a:ext cx="256032" cy="256032"/>
           </a:xfrm>
           <a:prstGeom prst="rect">
@@ -28016,7 +28016,7 @@
         </p:blipFill>
         <p:spPr>
           <a:xfrm>
-            <a:off x="8399069" y="3043047"/>
+            <a:off x="4624730" y="3043047"/>
             <a:ext cx="256032" cy="256032"/>
           </a:xfrm>
           <a:prstGeom prst="rect">
@@ -28040,8 +28040,8 @@
         </p:blipFill>
         <p:spPr>
           <a:xfrm>
-            <a:off x="749808" y="5186553"/>
-            <a:ext cx="310896" cy="310896"/>
+            <a:off x="8399069" y="3043047"/>
+            <a:ext cx="256032" cy="256032"/>
           </a:xfrm>
           <a:prstGeom prst="rect">
             <a:avLst/>
@@ -29110,7 +29110,7 @@
         </p:blipFill>
         <p:spPr>
           <a:xfrm>
-            <a:off x="850392" y="2661412"/>
+            <a:off x="8399069" y="2661412"/>
             <a:ext cx="256032" cy="256032"/>
           </a:xfrm>
           <a:prstGeom prst="rect">
@@ -29134,8 +29134,8 @@
         </p:blipFill>
         <p:spPr>
           <a:xfrm>
-            <a:off x="4624730" y="2661412"/>
-            <a:ext cx="256032" cy="256032"/>
+            <a:off x="749808" y="5019548"/>
+            <a:ext cx="310896" cy="310896"/>
           </a:xfrm>
           <a:prstGeom prst="rect">
             <a:avLst/>
@@ -29158,7 +29158,7 @@
         </p:blipFill>
         <p:spPr>
           <a:xfrm>
-            <a:off x="8399069" y="2661412"/>
+            <a:off x="850392" y="2661412"/>
             <a:ext cx="256032" cy="256032"/>
           </a:xfrm>
           <a:prstGeom prst="rect">
@@ -29182,8 +29182,8 @@
         </p:blipFill>
         <p:spPr>
           <a:xfrm>
-            <a:off x="749808" y="5019548"/>
-            <a:ext cx="310896" cy="310896"/>
+            <a:off x="4624730" y="2661412"/>
+            <a:ext cx="256032" cy="256032"/>
           </a:xfrm>
           <a:prstGeom prst="rect">
             <a:avLst/>
@@ -33180,7 +33180,7 @@
                             <a:srgbClr val="1D2D3E"/>
                           </a:solidFill>
                         </a:rPr>
-                        <a:t>Instante em UTC (aula 04.02)</a:t>
+                        <a:t>Instante em UTC (aula 02.02)</a:t>
                       </a:r>
                       <a:endParaRPr lang="en-US" sz="1200" dirty="0"/>
                     </a:p>
